--- a/public/fun/pack/pptx/wedding/결혼식_27_러브스토리중심_한가위달.pptx
+++ b/public/fun/pack/pptx/wedding/결혼식_27_러브스토리중심_한가위달.pptx
@@ -3286,6 +3286,14 @@
 <file path=ppt/slides/slide1.xml><?xml version="1.0" encoding="utf-8"?>
 <p:sld xmlns:a="http://schemas.openxmlformats.org/drawingml/2006/main" xmlns:p="http://schemas.openxmlformats.org/presentationml/2006/main" xmlns:r="http://schemas.openxmlformats.org/officeDocument/2006/relationships">
   <p:cSld>
+    <p:bg>
+      <p:bgPr>
+        <a:solidFill>
+          <a:srgbClr val="FBF6EC"/>
+        </a:solidFill>
+        <a:effectLst/>
+      </p:bgPr>
+    </p:bg>
     <p:spTree>
       <p:nvGrpSpPr>
         <p:cNvPr id="1" name=""/>
@@ -3293,30 +3301,119 @@
         <p:nvPr/>
       </p:nvGrpSpPr>
       <p:grpSpPr/>
-      <p:pic>
-        <p:nvPicPr>
-          <p:cNvPr id="3" name="표지 그림" descr="wedding-27.jpg"/>
-          <p:cNvPicPr>
-            <a:picLocks noChangeAspect="1"/>
-          </p:cNvPicPr>
-          <p:nvPr/>
-        </p:nvPicPr>
-        <p:blipFill>
-          <a:blip r:embed="rId2"/>
-          <a:stretch>
-            <a:fillRect/>
-          </a:stretch>
-        </p:blipFill>
-        <p:spPr>
-          <a:xfrm>
-            <a:off x="0" y="0"/>
-            <a:ext cx="12191695" cy="6858000"/>
+      <p:sp>
+        <p:nvSpPr>
+          <p:cNvPr id="3" name="사진 자리"/>
+          <p:cNvSpPr/>
+          <p:nvPr/>
+        </p:nvSpPr>
+        <p:spPr>
+          <a:xfrm>
+            <a:off x="1463003" y="685800"/>
+            <a:ext cx="3169840" cy="5486400"/>
+          </a:xfrm>
+          <a:prstGeom prst="round2SameRect">
+            <a:avLst>
+              <a:gd name="adj1" fmla="val 50000"/>
+              <a:gd name="adj2" fmla="val 0"/>
+            </a:avLst>
+          </a:prstGeom>
+          <a:solidFill>
+            <a:srgbClr val="EBD6AD"/>
+          </a:solidFill>
+          <a:ln>
+            <a:noFill/>
+          </a:ln>
+        </p:spPr>
+        <p:txBody>
+          <a:bodyPr rtlCol="0" anchor="ctr" wrap="square" lIns="54864" rIns="54864" tIns="27432" bIns="27432">
+            <a:noAutofit/>
+          </a:bodyPr>
+          <a:lstStyle/>
+          <a:p>
+            <a:pPr algn="ctr">
+              <a:lnSpc>
+                <a:spcPct val="100000"/>
+              </a:lnSpc>
+            </a:pPr>
+            <a:r>
+              <a:rPr sz="1400" b="0" i="0">
+                <a:solidFill>
+                  <a:srgbClr val="493E27"/>
+                </a:solidFill>
+              </a:rPr>
+              <a:t>사진을 넣어 주세요</a:t>
+            </a:r>
+          </a:p>
+        </p:txBody>
+      </p:sp>
+      <p:sp>
+        <p:nvSpPr>
+          <p:cNvPr id="4" name="장식"/>
+          <p:cNvSpPr/>
+          <p:nvPr/>
+        </p:nvSpPr>
+        <p:spPr>
+          <a:xfrm>
+            <a:off x="4358505" y="4251960"/>
+            <a:ext cx="1005840" cy="1005840"/>
+          </a:xfrm>
+          <a:prstGeom prst="ellipse">
+            <a:avLst/>
+          </a:prstGeom>
+          <a:solidFill>
+            <a:srgbClr val="EBD6AD"/>
+          </a:solidFill>
+          <a:ln>
+            <a:noFill/>
+          </a:ln>
+        </p:spPr>
+        <p:txBody>
+          <a:bodyPr rtlCol="0" anchor="ctr"/>
+          <a:lstStyle/>
+          <a:p>
+            <a:pPr algn="ctr"/>
+          </a:p>
+        </p:txBody>
+      </p:sp>
+      <p:sp>
+        <p:nvSpPr>
+          <p:cNvPr id="5" name="라벨"/>
+          <p:cNvSpPr txBox="1"/>
+          <p:nvPr/>
+        </p:nvSpPr>
+        <p:spPr>
+          <a:xfrm>
+            <a:off x="6827349" y="2148840"/>
+            <a:ext cx="4632844" cy="274320"/>
           </a:xfrm>
           <a:prstGeom prst="rect">
             <a:avLst/>
           </a:prstGeom>
-        </p:spPr>
-      </p:pic>
+          <a:noFill/>
+        </p:spPr>
+        <p:txBody>
+          <a:bodyPr wrap="square" lIns="54864" rIns="54864" tIns="27432" bIns="27432" anchor="t">
+            <a:noAutofit/>
+          </a:bodyPr>
+          <a:lstStyle/>
+          <a:p>
+            <a:pPr algn="l">
+              <a:lnSpc>
+                <a:spcPct val="115000"/>
+              </a:lnSpc>
+            </a:pPr>
+            <a:r>
+              <a:rPr sz="1000" b="1" i="0" spc="250">
+                <a:solidFill>
+                  <a:srgbClr val="26231F"/>
+                </a:solidFill>
+              </a:rPr>
+              <a:t>WEDDING</a:t>
+            </a:r>
+          </a:p>
+        </p:txBody>
+      </p:sp>
       <p:sp>
         <p:nvSpPr>
           <p:cNvPr id="2" name="Title 1"/>
@@ -3329,8 +3426,8 @@
         </p:nvSpPr>
         <p:spPr>
           <a:xfrm>
-            <a:off x="853418" y="2057400"/>
-            <a:ext cx="6095847" cy="1554480"/>
+            <a:off x="6827349" y="2606040"/>
+            <a:ext cx="4632844" cy="1188720"/>
           </a:xfrm>
         </p:spPr>
         <p:txBody>
@@ -3347,7 +3444,7 @@
             <a:r>
               <a:rPr sz="3600" b="1" i="0">
                 <a:solidFill>
-                  <a:srgbClr val="715214"/>
+                  <a:srgbClr val="26231F"/>
                 </a:solidFill>
               </a:rPr>
               <a:t>저희 결혼합니다</a:t>
@@ -3357,14 +3454,14 @@
       </p:sp>
       <p:sp>
         <p:nvSpPr>
-          <p:cNvPr id="4" name="한 줄 문구"/>
+          <p:cNvPr id="6" name="한 줄 문구"/>
           <p:cNvSpPr txBox="1"/>
           <p:nvPr/>
         </p:nvSpPr>
         <p:spPr>
           <a:xfrm>
-            <a:off x="853418" y="3749039"/>
-            <a:ext cx="6095847" cy="822960"/>
+            <a:off x="6827349" y="3886200"/>
+            <a:ext cx="4632844" cy="822960"/>
           </a:xfrm>
           <a:prstGeom prst="rect">
             <a:avLst/>
@@ -3383,9 +3480,9 @@
               </a:lnSpc>
             </a:pPr>
             <a:r>
-              <a:rPr sz="1700" b="0" i="1">
-                <a:solidFill>
-                  <a:srgbClr val="715214"/>
+              <a:rPr sz="1700" b="0" i="0">
+                <a:solidFill>
+                  <a:srgbClr val="26231F"/>
                 </a:solidFill>
               </a:rPr>
               <a:t>서로의 부모님을 처음 뵙던 날</a:t>
@@ -3395,14 +3492,14 @@
       </p:sp>
       <p:sp>
         <p:nvSpPr>
-          <p:cNvPr id="5" name="안내 문구"/>
+          <p:cNvPr id="7" name="안내 문구"/>
           <p:cNvSpPr txBox="1"/>
           <p:nvPr/>
         </p:nvSpPr>
         <p:spPr>
           <a:xfrm>
-            <a:off x="853418" y="4617720"/>
-            <a:ext cx="6095847" cy="914400"/>
+            <a:off x="6827349" y="4754880"/>
+            <a:ext cx="4632844" cy="914400"/>
           </a:xfrm>
           <a:prstGeom prst="rect">
             <a:avLst/>
@@ -3423,7 +3520,7 @@
             <a:r>
               <a:rPr sz="1400" b="0" i="0">
                 <a:solidFill>
-                  <a:srgbClr val="666666"/>
+                  <a:srgbClr val="26231F"/>
                 </a:solidFill>
               </a:rPr>
               <a:t>신랑 이름 ♥ 신부 이름</a:t>
@@ -3438,10 +3535,10 @@
             <a:r>
               <a:rPr sz="1400" b="0" i="0">
                 <a:solidFill>
-                  <a:srgbClr val="666666"/>
+                  <a:srgbClr val="26231F"/>
                 </a:solidFill>
               </a:rPr>
-              <a:t>2027. 00. 00 · 예식장 이름</a:t>
+              <a:t>날짜 입력 · 예식장 이름</a:t>
             </a:r>
           </a:p>
         </p:txBody>
@@ -3460,7 +3557,7 @@
     <p:bg>
       <p:bgPr>
         <a:solidFill>
-          <a:srgbClr val="F7E8C9"/>
+          <a:srgbClr val="FFFFFF"/>
         </a:solidFill>
         <a:effectLst/>
       </p:bgPr>
@@ -3474,26 +3571,52 @@
       <p:grpSpPr/>
       <p:sp>
         <p:nvSpPr>
-          <p:cNvPr id="3" name="장식"/>
+          <p:cNvPr id="3" name="포인트"/>
           <p:cNvSpPr/>
           <p:nvPr/>
         </p:nvSpPr>
         <p:spPr>
-          <a:xfrm>
-            <a:off x="274320" y="274320"/>
-            <a:ext cx="11643055" cy="6309360"/>
+          <a:xfrm rot="18900000">
+            <a:off x="5958687" y="246888"/>
+            <a:ext cx="274320" cy="274320"/>
+          </a:xfrm>
+          <a:prstGeom prst="teardrop">
+            <a:avLst/>
+          </a:prstGeom>
+          <a:solidFill>
+            <a:srgbClr val="D8B879"/>
+          </a:solidFill>
+          <a:ln>
+            <a:noFill/>
+          </a:ln>
+        </p:spPr>
+        <p:txBody>
+          <a:bodyPr rtlCol="0" anchor="ctr"/>
+          <a:lstStyle/>
+          <a:p>
+            <a:pPr algn="ctr"/>
+          </a:p>
+        </p:txBody>
+      </p:sp>
+      <p:sp>
+        <p:nvSpPr>
+          <p:cNvPr id="4" name="장식"/>
+          <p:cNvSpPr/>
+          <p:nvPr/>
+        </p:nvSpPr>
+        <p:spPr>
+          <a:xfrm>
+            <a:off x="5684367" y="1572768"/>
+            <a:ext cx="822960" cy="22860"/>
           </a:xfrm>
           <a:prstGeom prst="rect">
             <a:avLst/>
           </a:prstGeom>
           <a:solidFill>
-            <a:srgbClr val="FFFFFF"/>
+            <a:srgbClr val="D8B879"/>
           </a:solidFill>
-          <a:ln w="25400">
-            <a:solidFill>
-              <a:srgbClr val="C79123"/>
-            </a:solidFill>
-            <a:prstDash val="dash"/>
+          <a:ln>
+            <a:noFill/>
           </a:ln>
         </p:spPr>
         <p:txBody>
@@ -3506,19 +3629,19 @@
       </p:sp>
       <p:sp>
         <p:nvSpPr>
-          <p:cNvPr id="2" name="Title 1"/>
-          <p:cNvSpPr>
-            <a:spLocks noGrp="1"/>
-          </p:cNvSpPr>
-          <p:nvPr>
-            <p:ph type="title"/>
-          </p:nvPr>
-        </p:nvSpPr>
-        <p:spPr>
-          <a:xfrm>
-            <a:off x="777240" y="548640"/>
-            <a:ext cx="9357055" cy="822960"/>
-          </a:xfrm>
+          <p:cNvPr id="5" name="상단 라벨"/>
+          <p:cNvSpPr txBox="1"/>
+          <p:nvPr/>
+        </p:nvSpPr>
+        <p:spPr>
+          <a:xfrm>
+            <a:off x="640080" y="182880"/>
+            <a:ext cx="3657600" cy="274320"/>
+          </a:xfrm>
+          <a:prstGeom prst="rect">
+            <a:avLst/>
+          </a:prstGeom>
+          <a:noFill/>
         </p:spPr>
         <p:txBody>
           <a:bodyPr wrap="square" lIns="54864" rIns="54864" tIns="27432" bIns="27432" anchor="ctr">
@@ -3527,6 +3650,44 @@
           <a:lstStyle/>
           <a:p>
             <a:pPr algn="l">
+              <a:lnSpc>
+                <a:spcPct val="115000"/>
+              </a:lnSpc>
+            </a:pPr>
+            <a:r>
+              <a:rPr sz="800" b="1" i="0" spc="250">
+                <a:solidFill>
+                  <a:srgbClr val="8E8780"/>
+                </a:solidFill>
+              </a:rPr>
+              <a:t>WEDDING</a:t>
+            </a:r>
+          </a:p>
+        </p:txBody>
+      </p:sp>
+      <p:sp>
+        <p:nvSpPr>
+          <p:cNvPr id="2" name="Title 1"/>
+          <p:cNvSpPr>
+            <a:spLocks noGrp="1"/>
+          </p:cNvSpPr>
+          <p:nvPr>
+            <p:ph type="title"/>
+          </p:nvPr>
+        </p:nvSpPr>
+        <p:spPr>
+          <a:xfrm>
+            <a:off x="1371600" y="640080"/>
+            <a:ext cx="9448495" cy="868680"/>
+          </a:xfrm>
+        </p:spPr>
+        <p:txBody>
+          <a:bodyPr wrap="square" lIns="54864" rIns="54864" tIns="27432" bIns="27432" anchor="ctr">
+            <a:noAutofit/>
+          </a:bodyPr>
+          <a:lstStyle/>
+          <a:p>
+            <a:pPr algn="ctr">
               <a:lnSpc>
                 <a:spcPct val="105000"/>
               </a:lnSpc>
@@ -3534,7 +3695,7 @@
             <a:r>
               <a:rPr sz="3000" b="1" i="0">
                 <a:solidFill>
-                  <a:srgbClr val="715214"/>
+                  <a:srgbClr val="26231F"/>
                 </a:solidFill>
               </a:rPr>
               <a:t>신랑 · 신부 소개</a:t>
@@ -3544,25 +3705,23 @@
       </p:sp>
       <p:sp>
         <p:nvSpPr>
-          <p:cNvPr id="4" name="사진 자리"/>
+          <p:cNvPr id="6" name="사진 자리"/>
           <p:cNvSpPr/>
           <p:nvPr/>
         </p:nvSpPr>
         <p:spPr>
           <a:xfrm>
-            <a:off x="2042083" y="1554480"/>
-            <a:ext cx="2331720" cy="2331720"/>
+            <a:off x="1996363" y="1783080"/>
+            <a:ext cx="2286000" cy="2286000"/>
           </a:xfrm>
           <a:prstGeom prst="ellipse">
             <a:avLst/>
           </a:prstGeom>
           <a:solidFill>
-            <a:srgbClr val="F7E8C9"/>
+            <a:srgbClr val="F6EBD5"/>
           </a:solidFill>
           <a:ln w="19050">
-            <a:solidFill>
-              <a:srgbClr val="C79123"/>
-            </a:solidFill>
+            <a:noFill/>
             <a:prstDash val="dash"/>
           </a:ln>
         </p:spPr>
@@ -3580,7 +3739,7 @@
             <a:r>
               <a:rPr sz="1200" b="0" i="0">
                 <a:solidFill>
-                  <a:srgbClr val="715214"/>
+                  <a:srgbClr val="8E8780"/>
                 </a:solidFill>
               </a:rPr>
               <a:t>사진</a:t>
@@ -3590,14 +3749,14 @@
       </p:sp>
       <p:sp>
         <p:nvSpPr>
-          <p:cNvPr id="5" name="TextBox 4"/>
+          <p:cNvPr id="7" name="TextBox 6"/>
           <p:cNvSpPr txBox="1"/>
           <p:nvPr/>
         </p:nvSpPr>
         <p:spPr>
           <a:xfrm>
-            <a:off x="777240" y="3977639"/>
-            <a:ext cx="4861407" cy="411480"/>
+            <a:off x="640080" y="4160520"/>
+            <a:ext cx="4998567" cy="411480"/>
           </a:xfrm>
           <a:prstGeom prst="rect">
             <a:avLst/>
@@ -3618,7 +3777,7 @@
             <a:r>
               <a:rPr sz="1600" b="1" i="0">
                 <a:solidFill>
-                  <a:srgbClr val="715214"/>
+                  <a:srgbClr val="493E27"/>
                 </a:solidFill>
               </a:rPr>
               <a:t>신랑</a:t>
@@ -3628,14 +3787,14 @@
       </p:sp>
       <p:sp>
         <p:nvSpPr>
-          <p:cNvPr id="6" name="TextBox 5"/>
+          <p:cNvPr id="8" name="TextBox 7"/>
           <p:cNvSpPr txBox="1"/>
           <p:nvPr/>
         </p:nvSpPr>
         <p:spPr>
           <a:xfrm>
-            <a:off x="868680" y="4434840"/>
-            <a:ext cx="4678527" cy="1783079"/>
+            <a:off x="731519" y="4617720"/>
+            <a:ext cx="4815687" cy="1737360"/>
           </a:xfrm>
           <a:prstGeom prst="rect">
             <a:avLst/>
@@ -3696,25 +3855,23 @@
       </p:sp>
       <p:sp>
         <p:nvSpPr>
-          <p:cNvPr id="7" name="사진 자리"/>
+          <p:cNvPr id="9" name="사진 자리"/>
           <p:cNvSpPr/>
           <p:nvPr/>
         </p:nvSpPr>
         <p:spPr>
           <a:xfrm>
-            <a:off x="7817891" y="1554480"/>
-            <a:ext cx="2331720" cy="2331720"/>
+            <a:off x="7909331" y="1783080"/>
+            <a:ext cx="2286000" cy="2286000"/>
           </a:xfrm>
           <a:prstGeom prst="ellipse">
             <a:avLst/>
           </a:prstGeom>
           <a:solidFill>
-            <a:srgbClr val="F7E8C9"/>
+            <a:srgbClr val="F6EBD5"/>
           </a:solidFill>
           <a:ln w="19050">
-            <a:solidFill>
-              <a:srgbClr val="C79123"/>
-            </a:solidFill>
+            <a:noFill/>
             <a:prstDash val="dash"/>
           </a:ln>
         </p:spPr>
@@ -3732,7 +3889,7 @@
             <a:r>
               <a:rPr sz="1200" b="0" i="0">
                 <a:solidFill>
-                  <a:srgbClr val="715214"/>
+                  <a:srgbClr val="8E8780"/>
                 </a:solidFill>
               </a:rPr>
               <a:t>사진</a:t>
@@ -3742,14 +3899,14 @@
       </p:sp>
       <p:sp>
         <p:nvSpPr>
-          <p:cNvPr id="8" name="TextBox 7"/>
+          <p:cNvPr id="10" name="TextBox 9"/>
           <p:cNvSpPr txBox="1"/>
           <p:nvPr/>
         </p:nvSpPr>
         <p:spPr>
           <a:xfrm>
-            <a:off x="6553047" y="3977639"/>
-            <a:ext cx="4861407" cy="411480"/>
+            <a:off x="6553047" y="4160520"/>
+            <a:ext cx="4998567" cy="411480"/>
           </a:xfrm>
           <a:prstGeom prst="rect">
             <a:avLst/>
@@ -3770,7 +3927,7 @@
             <a:r>
               <a:rPr sz="1600" b="1" i="0">
                 <a:solidFill>
-                  <a:srgbClr val="715214"/>
+                  <a:srgbClr val="493E27"/>
                 </a:solidFill>
               </a:rPr>
               <a:t>신부</a:t>
@@ -3780,14 +3937,14 @@
       </p:sp>
       <p:sp>
         <p:nvSpPr>
-          <p:cNvPr id="9" name="TextBox 8"/>
+          <p:cNvPr id="11" name="TextBox 10"/>
           <p:cNvSpPr txBox="1"/>
           <p:nvPr/>
         </p:nvSpPr>
         <p:spPr>
           <a:xfrm>
-            <a:off x="6644487" y="4434840"/>
-            <a:ext cx="4678527" cy="1783079"/>
+            <a:off x="6644487" y="4617720"/>
+            <a:ext cx="4815687" cy="1737360"/>
           </a:xfrm>
           <a:prstGeom prst="rect">
             <a:avLst/>
@@ -3860,7 +4017,7 @@
     <p:bg>
       <p:bgPr>
         <a:solidFill>
-          <a:srgbClr val="F7E8C9"/>
+          <a:srgbClr val="FFFFFF"/>
         </a:solidFill>
         <a:effectLst/>
       </p:bgPr>
@@ -3874,26 +4031,52 @@
       <p:grpSpPr/>
       <p:sp>
         <p:nvSpPr>
-          <p:cNvPr id="3" name="장식"/>
+          <p:cNvPr id="3" name="포인트"/>
           <p:cNvSpPr/>
           <p:nvPr/>
         </p:nvSpPr>
         <p:spPr>
-          <a:xfrm>
-            <a:off x="274320" y="274320"/>
-            <a:ext cx="11643055" cy="6309360"/>
+          <a:xfrm rot="18900000">
+            <a:off x="5958687" y="246888"/>
+            <a:ext cx="274320" cy="274320"/>
+          </a:xfrm>
+          <a:prstGeom prst="teardrop">
+            <a:avLst/>
+          </a:prstGeom>
+          <a:solidFill>
+            <a:srgbClr val="D8B879"/>
+          </a:solidFill>
+          <a:ln>
+            <a:noFill/>
+          </a:ln>
+        </p:spPr>
+        <p:txBody>
+          <a:bodyPr rtlCol="0" anchor="ctr"/>
+          <a:lstStyle/>
+          <a:p>
+            <a:pPr algn="ctr"/>
+          </a:p>
+        </p:txBody>
+      </p:sp>
+      <p:sp>
+        <p:nvSpPr>
+          <p:cNvPr id="4" name="장식"/>
+          <p:cNvSpPr/>
+          <p:nvPr/>
+        </p:nvSpPr>
+        <p:spPr>
+          <a:xfrm>
+            <a:off x="5684367" y="1572768"/>
+            <a:ext cx="822960" cy="22860"/>
           </a:xfrm>
           <a:prstGeom prst="rect">
             <a:avLst/>
           </a:prstGeom>
           <a:solidFill>
-            <a:srgbClr val="FFFFFF"/>
+            <a:srgbClr val="D8B879"/>
           </a:solidFill>
-          <a:ln w="25400">
-            <a:solidFill>
-              <a:srgbClr val="C79123"/>
-            </a:solidFill>
-            <a:prstDash val="dash"/>
+          <a:ln>
+            <a:noFill/>
           </a:ln>
         </p:spPr>
         <p:txBody>
@@ -3906,19 +4089,19 @@
       </p:sp>
       <p:sp>
         <p:nvSpPr>
-          <p:cNvPr id="2" name="Title 1"/>
-          <p:cNvSpPr>
-            <a:spLocks noGrp="1"/>
-          </p:cNvSpPr>
-          <p:nvPr>
-            <p:ph type="title"/>
-          </p:nvPr>
-        </p:nvSpPr>
-        <p:spPr>
-          <a:xfrm>
-            <a:off x="777240" y="548640"/>
-            <a:ext cx="9357055" cy="822960"/>
-          </a:xfrm>
+          <p:cNvPr id="5" name="상단 라벨"/>
+          <p:cNvSpPr txBox="1"/>
+          <p:nvPr/>
+        </p:nvSpPr>
+        <p:spPr>
+          <a:xfrm>
+            <a:off x="640080" y="182880"/>
+            <a:ext cx="3657600" cy="274320"/>
+          </a:xfrm>
+          <a:prstGeom prst="rect">
+            <a:avLst/>
+          </a:prstGeom>
+          <a:noFill/>
         </p:spPr>
         <p:txBody>
           <a:bodyPr wrap="square" lIns="54864" rIns="54864" tIns="27432" bIns="27432" anchor="ctr">
@@ -3927,6 +4110,44 @@
           <a:lstStyle/>
           <a:p>
             <a:pPr algn="l">
+              <a:lnSpc>
+                <a:spcPct val="115000"/>
+              </a:lnSpc>
+            </a:pPr>
+            <a:r>
+              <a:rPr sz="800" b="1" i="0" spc="250">
+                <a:solidFill>
+                  <a:srgbClr val="8E8780"/>
+                </a:solidFill>
+              </a:rPr>
+              <a:t>WEDDING</a:t>
+            </a:r>
+          </a:p>
+        </p:txBody>
+      </p:sp>
+      <p:sp>
+        <p:nvSpPr>
+          <p:cNvPr id="2" name="Title 1"/>
+          <p:cNvSpPr>
+            <a:spLocks noGrp="1"/>
+          </p:cNvSpPr>
+          <p:nvPr>
+            <p:ph type="title"/>
+          </p:nvPr>
+        </p:nvSpPr>
+        <p:spPr>
+          <a:xfrm>
+            <a:off x="1371600" y="640080"/>
+            <a:ext cx="9448495" cy="868680"/>
+          </a:xfrm>
+        </p:spPr>
+        <p:txBody>
+          <a:bodyPr wrap="square" lIns="54864" rIns="54864" tIns="27432" bIns="27432" anchor="ctr">
+            <a:noAutofit/>
+          </a:bodyPr>
+          <a:lstStyle/>
+          <a:p>
+            <a:pPr algn="ctr">
               <a:lnSpc>
                 <a:spcPct val="105000"/>
               </a:lnSpc>
@@ -3934,7 +4155,7 @@
             <a:r>
               <a:rPr sz="3000" b="1" i="0">
                 <a:solidFill>
-                  <a:srgbClr val="715214"/>
+                  <a:srgbClr val="26231F"/>
                 </a:solidFill>
               </a:rPr>
               <a:t>우리의 이야기</a:t>
@@ -3944,20 +4165,20 @@
       </p:sp>
       <p:sp>
         <p:nvSpPr>
-          <p:cNvPr id="4" name="타임라인 선"/>
+          <p:cNvPr id="6" name="타임라인 선"/>
           <p:cNvSpPr/>
           <p:nvPr/>
         </p:nvSpPr>
         <p:spPr>
           <a:xfrm>
-            <a:off x="777240" y="3291840"/>
-            <a:ext cx="10637215" cy="54864"/>
+            <a:off x="640080" y="3520440"/>
+            <a:ext cx="10911535" cy="54864"/>
           </a:xfrm>
           <a:prstGeom prst="rect">
             <a:avLst/>
           </a:prstGeom>
           <a:solidFill>
-            <a:srgbClr val="F7E8C9"/>
+            <a:srgbClr val="F6EBD5"/>
           </a:solidFill>
           <a:ln>
             <a:noFill/>
@@ -3973,20 +4194,20 @@
       </p:sp>
       <p:sp>
         <p:nvSpPr>
-          <p:cNvPr id="5" name="때 1"/>
+          <p:cNvPr id="7" name="때 1"/>
           <p:cNvSpPr/>
           <p:nvPr/>
         </p:nvSpPr>
         <p:spPr>
           <a:xfrm>
-            <a:off x="1905723" y="3108960"/>
+            <a:off x="1802853" y="3337560"/>
             <a:ext cx="402336" cy="402336"/>
           </a:xfrm>
           <a:prstGeom prst="ellipse">
             <a:avLst/>
           </a:prstGeom>
           <a:solidFill>
-            <a:srgbClr val="C79123"/>
+            <a:srgbClr val="D8B879"/>
           </a:solidFill>
           <a:ln w="38100">
             <a:solidFill>
@@ -4004,14 +4225,14 @@
       </p:sp>
       <p:sp>
         <p:nvSpPr>
-          <p:cNvPr id="6" name="TextBox 5"/>
+          <p:cNvPr id="8" name="TextBox 7"/>
           <p:cNvSpPr txBox="1"/>
           <p:nvPr/>
         </p:nvSpPr>
         <p:spPr>
           <a:xfrm>
-            <a:off x="822959" y="2468880"/>
-            <a:ext cx="2567863" cy="457200"/>
+            <a:off x="685800" y="2697480"/>
+            <a:ext cx="2636443" cy="457200"/>
           </a:xfrm>
           <a:prstGeom prst="rect">
             <a:avLst/>
@@ -4032,7 +4253,7 @@
             <a:r>
               <a:rPr sz="1600" b="1" i="0">
                 <a:solidFill>
-                  <a:srgbClr val="C79123"/>
+                  <a:srgbClr val="D8B879"/>
                 </a:solidFill>
               </a:rPr>
               <a:t>처음 만난 날</a:t>
@@ -4042,14 +4263,14 @@
       </p:sp>
       <p:sp>
         <p:nvSpPr>
-          <p:cNvPr id="7" name="TextBox 6"/>
+          <p:cNvPr id="9" name="TextBox 8"/>
           <p:cNvSpPr txBox="1"/>
           <p:nvPr/>
         </p:nvSpPr>
         <p:spPr>
           <a:xfrm>
-            <a:off x="868679" y="3657600"/>
-            <a:ext cx="2476423" cy="457200"/>
+            <a:off x="731519" y="3886200"/>
+            <a:ext cx="2545003" cy="457200"/>
           </a:xfrm>
           <a:prstGeom prst="rect">
             <a:avLst/>
@@ -4070,7 +4291,7 @@
             <a:r>
               <a:rPr sz="1800" b="1" i="0">
                 <a:solidFill>
-                  <a:srgbClr val="715214"/>
+                  <a:srgbClr val="493E27"/>
                 </a:solidFill>
               </a:rPr>
               <a:t>첫 만남</a:t>
@@ -4080,14 +4301,14 @@
       </p:sp>
       <p:sp>
         <p:nvSpPr>
-          <p:cNvPr id="8" name="TextBox 7"/>
+          <p:cNvPr id="10" name="TextBox 9"/>
           <p:cNvSpPr txBox="1"/>
           <p:nvPr/>
         </p:nvSpPr>
         <p:spPr>
           <a:xfrm>
-            <a:off x="868679" y="4160520"/>
-            <a:ext cx="2476423" cy="1645920"/>
+            <a:off x="731519" y="4389120"/>
+            <a:ext cx="2545003" cy="1645920"/>
           </a:xfrm>
           <a:prstGeom prst="rect">
             <a:avLst/>
@@ -4108,7 +4329,7 @@
             <a:r>
               <a:rPr sz="1500" b="0" i="0">
                 <a:solidFill>
-                  <a:srgbClr val="2B2B2B"/>
+                  <a:srgbClr val="26231F"/>
                 </a:solidFill>
               </a:rPr>
               <a:t>어디에서 어떻게?</a:t>
@@ -4118,20 +4339,20 @@
       </p:sp>
       <p:sp>
         <p:nvSpPr>
-          <p:cNvPr id="9" name="때 2"/>
+          <p:cNvPr id="11" name="때 2"/>
           <p:cNvSpPr/>
           <p:nvPr/>
         </p:nvSpPr>
         <p:spPr>
           <a:xfrm>
-            <a:off x="4565027" y="3108960"/>
+            <a:off x="4530737" y="3337560"/>
             <a:ext cx="402336" cy="402336"/>
           </a:xfrm>
           <a:prstGeom prst="ellipse">
             <a:avLst/>
           </a:prstGeom>
           <a:solidFill>
-            <a:srgbClr val="C79123"/>
+            <a:srgbClr val="D8B879"/>
           </a:solidFill>
           <a:ln w="38100">
             <a:solidFill>
@@ -4149,14 +4370,14 @@
       </p:sp>
       <p:sp>
         <p:nvSpPr>
-          <p:cNvPr id="10" name="TextBox 9"/>
+          <p:cNvPr id="12" name="TextBox 11"/>
           <p:cNvSpPr txBox="1"/>
           <p:nvPr/>
         </p:nvSpPr>
         <p:spPr>
           <a:xfrm>
-            <a:off x="3482263" y="2468880"/>
-            <a:ext cx="2567863" cy="457200"/>
+            <a:off x="3413683" y="2697480"/>
+            <a:ext cx="2636443" cy="457200"/>
           </a:xfrm>
           <a:prstGeom prst="rect">
             <a:avLst/>
@@ -4177,7 +4398,7 @@
             <a:r>
               <a:rPr sz="1600" b="1" i="0">
                 <a:solidFill>
-                  <a:srgbClr val="C79123"/>
+                  <a:srgbClr val="D8B879"/>
                 </a:solidFill>
               </a:rPr>
               <a:t>첫 데이트</a:t>
@@ -4187,14 +4408,14 @@
       </p:sp>
       <p:sp>
         <p:nvSpPr>
-          <p:cNvPr id="11" name="TextBox 10"/>
+          <p:cNvPr id="13" name="TextBox 12"/>
           <p:cNvSpPr txBox="1"/>
           <p:nvPr/>
         </p:nvSpPr>
         <p:spPr>
           <a:xfrm>
-            <a:off x="3527983" y="3657600"/>
-            <a:ext cx="2476423" cy="457200"/>
+            <a:off x="3459403" y="3886200"/>
+            <a:ext cx="2545003" cy="457200"/>
           </a:xfrm>
           <a:prstGeom prst="rect">
             <a:avLst/>
@@ -4215,7 +4436,7 @@
             <a:r>
               <a:rPr sz="1800" b="1" i="0">
                 <a:solidFill>
-                  <a:srgbClr val="715214"/>
+                  <a:srgbClr val="493E27"/>
                 </a:solidFill>
               </a:rPr>
               <a:t>설레던 하루</a:t>
@@ -4225,14 +4446,14 @@
       </p:sp>
       <p:sp>
         <p:nvSpPr>
-          <p:cNvPr id="12" name="TextBox 11"/>
+          <p:cNvPr id="14" name="TextBox 13"/>
           <p:cNvSpPr txBox="1"/>
           <p:nvPr/>
         </p:nvSpPr>
         <p:spPr>
           <a:xfrm>
-            <a:off x="3527983" y="4160520"/>
-            <a:ext cx="2476423" cy="1645920"/>
+            <a:off x="3459403" y="4389120"/>
+            <a:ext cx="2545003" cy="1645920"/>
           </a:xfrm>
           <a:prstGeom prst="rect">
             <a:avLst/>
@@ -4253,7 +4474,7 @@
             <a:r>
               <a:rPr sz="1500" b="0" i="0">
                 <a:solidFill>
-                  <a:srgbClr val="2B2B2B"/>
+                  <a:srgbClr val="26231F"/>
                 </a:solidFill>
               </a:rPr>
               <a:t>무엇을 했나요?</a:t>
@@ -4263,20 +4484,20 @@
       </p:sp>
       <p:sp>
         <p:nvSpPr>
-          <p:cNvPr id="13" name="때 3"/>
+          <p:cNvPr id="15" name="때 3"/>
           <p:cNvSpPr/>
           <p:nvPr/>
         </p:nvSpPr>
         <p:spPr>
           <a:xfrm>
-            <a:off x="7224331" y="3108960"/>
+            <a:off x="7258621" y="3337560"/>
             <a:ext cx="402336" cy="402336"/>
           </a:xfrm>
           <a:prstGeom prst="ellipse">
             <a:avLst/>
           </a:prstGeom>
           <a:solidFill>
-            <a:srgbClr val="C79123"/>
+            <a:srgbClr val="D8B879"/>
           </a:solidFill>
           <a:ln w="38100">
             <a:solidFill>
@@ -4294,14 +4515,14 @@
       </p:sp>
       <p:sp>
         <p:nvSpPr>
-          <p:cNvPr id="14" name="TextBox 13"/>
+          <p:cNvPr id="16" name="TextBox 15"/>
           <p:cNvSpPr txBox="1"/>
           <p:nvPr/>
         </p:nvSpPr>
         <p:spPr>
           <a:xfrm>
-            <a:off x="6141567" y="2468880"/>
-            <a:ext cx="2567863" cy="457200"/>
+            <a:off x="6141567" y="2697480"/>
+            <a:ext cx="2636443" cy="457200"/>
           </a:xfrm>
           <a:prstGeom prst="rect">
             <a:avLst/>
@@ -4322,7 +4543,7 @@
             <a:r>
               <a:rPr sz="1600" b="1" i="0">
                 <a:solidFill>
-                  <a:srgbClr val="C79123"/>
+                  <a:srgbClr val="D8B879"/>
                 </a:solidFill>
               </a:rPr>
               <a:t>프러포즈</a:t>
@@ -4332,14 +4553,14 @@
       </p:sp>
       <p:sp>
         <p:nvSpPr>
-          <p:cNvPr id="15" name="TextBox 14"/>
+          <p:cNvPr id="17" name="TextBox 16"/>
           <p:cNvSpPr txBox="1"/>
           <p:nvPr/>
         </p:nvSpPr>
         <p:spPr>
           <a:xfrm>
-            <a:off x="6187287" y="3657600"/>
-            <a:ext cx="2476423" cy="457200"/>
+            <a:off x="6187287" y="3886200"/>
+            <a:ext cx="2545003" cy="457200"/>
           </a:xfrm>
           <a:prstGeom prst="rect">
             <a:avLst/>
@@ -4360,7 +4581,7 @@
             <a:r>
               <a:rPr sz="1800" b="1" i="0">
                 <a:solidFill>
-                  <a:srgbClr val="715214"/>
+                  <a:srgbClr val="493E27"/>
                 </a:solidFill>
               </a:rPr>
               <a:t>평생을 약속하다</a:t>
@@ -4370,14 +4591,14 @@
       </p:sp>
       <p:sp>
         <p:nvSpPr>
-          <p:cNvPr id="16" name="TextBox 15"/>
+          <p:cNvPr id="18" name="TextBox 17"/>
           <p:cNvSpPr txBox="1"/>
           <p:nvPr/>
         </p:nvSpPr>
         <p:spPr>
           <a:xfrm>
-            <a:off x="6187287" y="4160520"/>
-            <a:ext cx="2476423" cy="1645920"/>
+            <a:off x="6187287" y="4389120"/>
+            <a:ext cx="2545003" cy="1645920"/>
           </a:xfrm>
           <a:prstGeom prst="rect">
             <a:avLst/>
@@ -4398,7 +4619,7 @@
             <a:r>
               <a:rPr sz="1500" b="0" i="0">
                 <a:solidFill>
-                  <a:srgbClr val="2B2B2B"/>
+                  <a:srgbClr val="26231F"/>
                 </a:solidFill>
               </a:rPr>
               <a:t>그날의 이야기</a:t>
@@ -4408,20 +4629,20 @@
       </p:sp>
       <p:sp>
         <p:nvSpPr>
-          <p:cNvPr id="17" name="때 4"/>
+          <p:cNvPr id="19" name="때 4"/>
           <p:cNvSpPr/>
           <p:nvPr/>
         </p:nvSpPr>
         <p:spPr>
           <a:xfrm>
-            <a:off x="9883635" y="3108960"/>
+            <a:off x="9986505" y="3337560"/>
             <a:ext cx="402336" cy="402336"/>
           </a:xfrm>
           <a:prstGeom prst="ellipse">
             <a:avLst/>
           </a:prstGeom>
           <a:solidFill>
-            <a:srgbClr val="C79123"/>
+            <a:srgbClr val="D8B879"/>
           </a:solidFill>
           <a:ln w="38100">
             <a:solidFill>
@@ -4439,14 +4660,14 @@
       </p:sp>
       <p:sp>
         <p:nvSpPr>
-          <p:cNvPr id="18" name="TextBox 17"/>
+          <p:cNvPr id="20" name="TextBox 19"/>
           <p:cNvSpPr txBox="1"/>
           <p:nvPr/>
         </p:nvSpPr>
         <p:spPr>
           <a:xfrm>
-            <a:off x="8800871" y="2468880"/>
-            <a:ext cx="2567863" cy="457200"/>
+            <a:off x="8869451" y="2697480"/>
+            <a:ext cx="2636443" cy="457200"/>
           </a:xfrm>
           <a:prstGeom prst="rect">
             <a:avLst/>
@@ -4467,7 +4688,7 @@
             <a:r>
               <a:rPr sz="1600" b="1" i="0">
                 <a:solidFill>
-                  <a:srgbClr val="C79123"/>
+                  <a:srgbClr val="D8B879"/>
                 </a:solidFill>
               </a:rPr>
               <a:t>결혼</a:t>
@@ -4477,14 +4698,14 @@
       </p:sp>
       <p:sp>
         <p:nvSpPr>
-          <p:cNvPr id="19" name="TextBox 18"/>
+          <p:cNvPr id="21" name="TextBox 20"/>
           <p:cNvSpPr txBox="1"/>
           <p:nvPr/>
         </p:nvSpPr>
         <p:spPr>
           <a:xfrm>
-            <a:off x="8846591" y="3657600"/>
-            <a:ext cx="2476423" cy="457200"/>
+            <a:off x="8915171" y="3886200"/>
+            <a:ext cx="2545003" cy="457200"/>
           </a:xfrm>
           <a:prstGeom prst="rect">
             <a:avLst/>
@@ -4505,7 +4726,7 @@
             <a:r>
               <a:rPr sz="1800" b="1" i="0">
                 <a:solidFill>
-                  <a:srgbClr val="715214"/>
+                  <a:srgbClr val="493E27"/>
                 </a:solidFill>
               </a:rPr>
               <a:t>오늘의 우리</a:t>
@@ -4515,14 +4736,14 @@
       </p:sp>
       <p:sp>
         <p:nvSpPr>
-          <p:cNvPr id="20" name="TextBox 19"/>
+          <p:cNvPr id="22" name="TextBox 21"/>
           <p:cNvSpPr txBox="1"/>
           <p:nvPr/>
         </p:nvSpPr>
         <p:spPr>
           <a:xfrm>
-            <a:off x="8846591" y="4160520"/>
-            <a:ext cx="2476423" cy="1645920"/>
+            <a:off x="8915171" y="4389120"/>
+            <a:ext cx="2545003" cy="1645920"/>
           </a:xfrm>
           <a:prstGeom prst="rect">
             <a:avLst/>
@@ -4543,7 +4764,7 @@
             <a:r>
               <a:rPr sz="1500" b="0" i="0">
                 <a:solidFill>
-                  <a:srgbClr val="2B2B2B"/>
+                  <a:srgbClr val="26231F"/>
                 </a:solidFill>
               </a:rPr>
               <a:t>함께 시작합니다</a:t>
@@ -4565,7 +4786,7 @@
     <p:bg>
       <p:bgPr>
         <a:solidFill>
-          <a:srgbClr val="F7E8C9"/>
+          <a:srgbClr val="FFFFFF"/>
         </a:solidFill>
         <a:effectLst/>
       </p:bgPr>
@@ -4579,160 +4800,72 @@
       <p:grpSpPr/>
       <p:sp>
         <p:nvSpPr>
-          <p:cNvPr id="3" name="장식"/>
+          <p:cNvPr id="3" name="포인트"/>
           <p:cNvSpPr/>
           <p:nvPr/>
         </p:nvSpPr>
         <p:spPr>
-          <a:xfrm>
-            <a:off x="274320" y="274320"/>
-            <a:ext cx="11643055" cy="6309360"/>
-          </a:xfrm>
-          <a:prstGeom prst="rect">
+          <a:xfrm rot="18900000">
+            <a:off x="5958687" y="246888"/>
+            <a:ext cx="274320" cy="274320"/>
+          </a:xfrm>
+          <a:prstGeom prst="teardrop">
             <a:avLst/>
           </a:prstGeom>
           <a:solidFill>
-            <a:srgbClr val="FFFFFF"/>
-          </a:solidFill>
-          <a:ln w="25400">
-            <a:solidFill>
-              <a:srgbClr val="C79123"/>
-            </a:solidFill>
-            <a:prstDash val="dash"/>
-          </a:ln>
-        </p:spPr>
-        <p:txBody>
-          <a:bodyPr rtlCol="0" anchor="ctr"/>
-          <a:lstStyle/>
-          <a:p>
-            <a:pPr algn="ctr"/>
-          </a:p>
-        </p:txBody>
-      </p:sp>
-      <p:sp>
-        <p:nvSpPr>
-          <p:cNvPr id="2" name="Title 1"/>
-          <p:cNvSpPr>
-            <a:spLocks noGrp="1"/>
-          </p:cNvSpPr>
-          <p:nvPr>
-            <p:ph type="title"/>
-          </p:nvPr>
-        </p:nvSpPr>
-        <p:spPr>
-          <a:xfrm>
-            <a:off x="777240" y="548640"/>
-            <a:ext cx="9357055" cy="822960"/>
-          </a:xfrm>
-        </p:spPr>
-        <p:txBody>
-          <a:bodyPr wrap="square" lIns="54864" rIns="54864" tIns="27432" bIns="27432" anchor="ctr">
-            <a:noAutofit/>
-          </a:bodyPr>
-          <a:lstStyle/>
-          <a:p>
-            <a:pPr algn="l">
-              <a:lnSpc>
-                <a:spcPct val="105000"/>
-              </a:lnSpc>
-            </a:pPr>
-            <a:r>
-              <a:rPr sz="3000" b="1" i="0">
-                <a:solidFill>
-                  <a:srgbClr val="715214"/>
-                </a:solidFill>
-              </a:rPr>
-              <a:t>우리의 첫 번째</a:t>
-            </a:r>
-          </a:p>
-        </p:txBody>
-      </p:sp>
-      <p:sp>
-        <p:nvSpPr>
-          <p:cNvPr id="4" name="카드 1"/>
-          <p:cNvSpPr/>
-          <p:nvPr/>
-        </p:nvSpPr>
-        <p:spPr>
-          <a:xfrm>
-            <a:off x="777240" y="1554480"/>
-            <a:ext cx="2487853" cy="4663440"/>
-          </a:xfrm>
-          <a:prstGeom prst="roundRect">
-            <a:avLst>
-              <a:gd name="adj" fmla="val 8000"/>
-            </a:avLst>
-          </a:prstGeom>
-          <a:solidFill>
-            <a:srgbClr val="FCF7EE"/>
-          </a:solidFill>
-          <a:ln w="15875">
-            <a:solidFill>
-              <a:srgbClr val="F7E8C9"/>
-            </a:solidFill>
-          </a:ln>
-        </p:spPr>
-        <p:txBody>
-          <a:bodyPr rtlCol="0" anchor="ctr"/>
-          <a:lstStyle/>
-          <a:p>
-            <a:pPr algn="ctr"/>
-          </a:p>
-        </p:txBody>
-      </p:sp>
-      <p:sp>
-        <p:nvSpPr>
-          <p:cNvPr id="5" name="번호 1"/>
-          <p:cNvSpPr/>
-          <p:nvPr/>
-        </p:nvSpPr>
-        <p:spPr>
-          <a:xfrm>
-            <a:off x="960120" y="1737360"/>
-            <a:ext cx="457200" cy="457200"/>
-          </a:xfrm>
-          <a:prstGeom prst="ellipse">
-            <a:avLst/>
-          </a:prstGeom>
-          <a:solidFill>
-            <a:srgbClr val="C79123"/>
+            <a:srgbClr val="D8B879"/>
           </a:solidFill>
           <a:ln>
             <a:noFill/>
           </a:ln>
         </p:spPr>
         <p:txBody>
-          <a:bodyPr rtlCol="0" anchor="ctr" wrap="square" lIns="54864" rIns="54864" tIns="27432" bIns="27432">
-            <a:noAutofit/>
-          </a:bodyPr>
-          <a:lstStyle/>
-          <a:p>
-            <a:pPr algn="ctr">
-              <a:lnSpc>
-                <a:spcPct val="100000"/>
-              </a:lnSpc>
-            </a:pPr>
-            <a:r>
-              <a:rPr sz="1600" b="1" i="0">
-                <a:solidFill>
-                  <a:srgbClr val="FFFFFF"/>
-                </a:solidFill>
-              </a:rPr>
-              <a:t>1</a:t>
-            </a:r>
-          </a:p>
-        </p:txBody>
-      </p:sp>
-      <p:sp>
-        <p:nvSpPr>
-          <p:cNvPr id="6" name="TextBox 5"/>
+          <a:bodyPr rtlCol="0" anchor="ctr"/>
+          <a:lstStyle/>
+          <a:p>
+            <a:pPr algn="ctr"/>
+          </a:p>
+        </p:txBody>
+      </p:sp>
+      <p:sp>
+        <p:nvSpPr>
+          <p:cNvPr id="4" name="장식"/>
+          <p:cNvSpPr/>
+          <p:nvPr/>
+        </p:nvSpPr>
+        <p:spPr>
+          <a:xfrm>
+            <a:off x="5684367" y="1572768"/>
+            <a:ext cx="822960" cy="22860"/>
+          </a:xfrm>
+          <a:prstGeom prst="rect">
+            <a:avLst/>
+          </a:prstGeom>
+          <a:solidFill>
+            <a:srgbClr val="D8B879"/>
+          </a:solidFill>
+          <a:ln>
+            <a:noFill/>
+          </a:ln>
+        </p:spPr>
+        <p:txBody>
+          <a:bodyPr rtlCol="0" anchor="ctr"/>
+          <a:lstStyle/>
+          <a:p>
+            <a:pPr algn="ctr"/>
+          </a:p>
+        </p:txBody>
+      </p:sp>
+      <p:sp>
+        <p:nvSpPr>
+          <p:cNvPr id="5" name="상단 라벨"/>
           <p:cNvSpPr txBox="1"/>
           <p:nvPr/>
         </p:nvSpPr>
         <p:spPr>
           <a:xfrm>
-            <a:off x="914400" y="2331720"/>
-            <a:ext cx="2213533" cy="640080"/>
+            <a:off x="640080" y="182880"/>
+            <a:ext cx="3657600" cy="274320"/>
           </a:xfrm>
           <a:prstGeom prst="rect">
             <a:avLst/>
@@ -4751,9 +4884,154 @@
               </a:lnSpc>
             </a:pPr>
             <a:r>
+              <a:rPr sz="800" b="1" i="0" spc="250">
+                <a:solidFill>
+                  <a:srgbClr val="8E8780"/>
+                </a:solidFill>
+              </a:rPr>
+              <a:t>WEDDING</a:t>
+            </a:r>
+          </a:p>
+        </p:txBody>
+      </p:sp>
+      <p:sp>
+        <p:nvSpPr>
+          <p:cNvPr id="2" name="Title 1"/>
+          <p:cNvSpPr>
+            <a:spLocks noGrp="1"/>
+          </p:cNvSpPr>
+          <p:nvPr>
+            <p:ph type="title"/>
+          </p:nvPr>
+        </p:nvSpPr>
+        <p:spPr>
+          <a:xfrm>
+            <a:off x="1371600" y="640080"/>
+            <a:ext cx="9448495" cy="868680"/>
+          </a:xfrm>
+        </p:spPr>
+        <p:txBody>
+          <a:bodyPr wrap="square" lIns="54864" rIns="54864" tIns="27432" bIns="27432" anchor="ctr">
+            <a:noAutofit/>
+          </a:bodyPr>
+          <a:lstStyle/>
+          <a:p>
+            <a:pPr algn="ctr">
+              <a:lnSpc>
+                <a:spcPct val="105000"/>
+              </a:lnSpc>
+            </a:pPr>
+            <a:r>
+              <a:rPr sz="3000" b="1" i="0">
+                <a:solidFill>
+                  <a:srgbClr val="26231F"/>
+                </a:solidFill>
+              </a:rPr>
+              <a:t>우리의 첫 번째</a:t>
+            </a:r>
+          </a:p>
+        </p:txBody>
+      </p:sp>
+      <p:sp>
+        <p:nvSpPr>
+          <p:cNvPr id="6" name="카드 1"/>
+          <p:cNvSpPr/>
+          <p:nvPr/>
+        </p:nvSpPr>
+        <p:spPr>
+          <a:xfrm>
+            <a:off x="640080" y="1783080"/>
+            <a:ext cx="2556433" cy="4572000"/>
+          </a:xfrm>
+          <a:prstGeom prst="roundRect">
+            <a:avLst>
+              <a:gd name="adj" fmla="val 7000"/>
+            </a:avLst>
+          </a:prstGeom>
+          <a:noFill/>
+          <a:ln w="15875">
+            <a:solidFill>
+              <a:srgbClr val="D8B879"/>
+            </a:solidFill>
+          </a:ln>
+        </p:spPr>
+        <p:txBody>
+          <a:bodyPr rtlCol="0" anchor="ctr"/>
+          <a:lstStyle/>
+          <a:p>
+            <a:pPr algn="ctr"/>
+          </a:p>
+        </p:txBody>
+      </p:sp>
+      <p:sp>
+        <p:nvSpPr>
+          <p:cNvPr id="7" name="번호 1"/>
+          <p:cNvSpPr txBox="1"/>
+          <p:nvPr/>
+        </p:nvSpPr>
+        <p:spPr>
+          <a:xfrm>
+            <a:off x="731519" y="1920240"/>
+            <a:ext cx="914400" cy="548640"/>
+          </a:xfrm>
+          <a:prstGeom prst="rect">
+            <a:avLst/>
+          </a:prstGeom>
+          <a:noFill/>
+        </p:spPr>
+        <p:txBody>
+          <a:bodyPr wrap="square" lIns="54864" rIns="54864" tIns="27432" bIns="27432" anchor="ctr">
+            <a:noAutofit/>
+          </a:bodyPr>
+          <a:lstStyle/>
+          <a:p>
+            <a:pPr algn="l">
+              <a:lnSpc>
+                <a:spcPct val="115000"/>
+              </a:lnSpc>
+            </a:pPr>
+            <a:r>
+              <a:rPr sz="2400" b="1" i="0">
+                <a:solidFill>
+                  <a:srgbClr val="D8B879"/>
+                </a:solidFill>
+              </a:rPr>
+              <a:t>01</a:t>
+            </a:r>
+          </a:p>
+        </p:txBody>
+      </p:sp>
+      <p:sp>
+        <p:nvSpPr>
+          <p:cNvPr id="8" name="TextBox 7"/>
+          <p:cNvSpPr txBox="1"/>
+          <p:nvPr/>
+        </p:nvSpPr>
+        <p:spPr>
+          <a:xfrm>
+            <a:off x="777240" y="2560320"/>
+            <a:ext cx="2282113" cy="640080"/>
+          </a:xfrm>
+          <a:prstGeom prst="rect">
+            <a:avLst/>
+          </a:prstGeom>
+          <a:noFill/>
+        </p:spPr>
+        <p:txBody>
+          <a:bodyPr wrap="square" lIns="54864" rIns="54864" tIns="27432" bIns="27432" anchor="ctr">
+            <a:noAutofit/>
+          </a:bodyPr>
+          <a:lstStyle/>
+          <a:p>
+            <a:pPr algn="l">
+              <a:lnSpc>
+                <a:spcPct val="115000"/>
+              </a:lnSpc>
+            </a:pPr>
+            <a:r>
               <a:rPr sz="1800" b="1" i="0">
                 <a:solidFill>
-                  <a:srgbClr val="715214"/>
+                  <a:srgbClr val="493E27"/>
                 </a:solidFill>
               </a:rPr>
               <a:t>첫 여행</a:t>
@@ -4763,14 +5041,14 @@
       </p:sp>
       <p:sp>
         <p:nvSpPr>
-          <p:cNvPr id="7" name="TextBox 6"/>
+          <p:cNvPr id="9" name="TextBox 8"/>
           <p:cNvSpPr txBox="1"/>
           <p:nvPr/>
         </p:nvSpPr>
         <p:spPr>
           <a:xfrm>
-            <a:off x="914400" y="3017520"/>
-            <a:ext cx="2213533" cy="3063239"/>
+            <a:off x="777240" y="3246120"/>
+            <a:ext cx="2282113" cy="2971800"/>
           </a:xfrm>
           <a:prstGeom prst="rect">
             <a:avLst/>
@@ -4791,7 +5069,7 @@
             <a:r>
               <a:rPr sz="1500" b="0" i="0">
                 <a:solidFill>
-                  <a:srgbClr val="2B2B2B"/>
+                  <a:srgbClr val="26231F"/>
                 </a:solidFill>
               </a:rPr>
               <a:t>어디였나요?</a:t>
@@ -4801,26 +5079,24 @@
       </p:sp>
       <p:sp>
         <p:nvSpPr>
-          <p:cNvPr id="8" name="카드 2"/>
+          <p:cNvPr id="10" name="카드 2"/>
           <p:cNvSpPr/>
           <p:nvPr/>
         </p:nvSpPr>
         <p:spPr>
           <a:xfrm>
-            <a:off x="3493693" y="1554480"/>
-            <a:ext cx="2487853" cy="4663440"/>
+            <a:off x="3425113" y="1783080"/>
+            <a:ext cx="2556433" cy="4572000"/>
           </a:xfrm>
           <a:prstGeom prst="roundRect">
             <a:avLst>
-              <a:gd name="adj" fmla="val 8000"/>
+              <a:gd name="adj" fmla="val 7000"/>
             </a:avLst>
           </a:prstGeom>
-          <a:solidFill>
-            <a:srgbClr val="FCF7EE"/>
-          </a:solidFill>
+          <a:noFill/>
           <a:ln w="15875">
             <a:solidFill>
-              <a:srgbClr val="F7E8C9"/>
+              <a:srgbClr val="D8B879"/>
             </a:solidFill>
           </a:ln>
         </p:spPr>
@@ -4834,57 +5110,14 @@
       </p:sp>
       <p:sp>
         <p:nvSpPr>
-          <p:cNvPr id="9" name="번호 2"/>
-          <p:cNvSpPr/>
-          <p:nvPr/>
-        </p:nvSpPr>
-        <p:spPr>
-          <a:xfrm>
-            <a:off x="3676573" y="1737360"/>
-            <a:ext cx="457200" cy="457200"/>
-          </a:xfrm>
-          <a:prstGeom prst="ellipse">
-            <a:avLst/>
-          </a:prstGeom>
-          <a:solidFill>
-            <a:srgbClr val="C79123"/>
-          </a:solidFill>
-          <a:ln>
-            <a:noFill/>
-          </a:ln>
-        </p:spPr>
-        <p:txBody>
-          <a:bodyPr rtlCol="0" anchor="ctr" wrap="square" lIns="54864" rIns="54864" tIns="27432" bIns="27432">
-            <a:noAutofit/>
-          </a:bodyPr>
-          <a:lstStyle/>
-          <a:p>
-            <a:pPr algn="ctr">
-              <a:lnSpc>
-                <a:spcPct val="100000"/>
-              </a:lnSpc>
-            </a:pPr>
-            <a:r>
-              <a:rPr sz="1600" b="1" i="0">
-                <a:solidFill>
-                  <a:srgbClr val="FFFFFF"/>
-                </a:solidFill>
-              </a:rPr>
-              <a:t>2</a:t>
-            </a:r>
-          </a:p>
-        </p:txBody>
-      </p:sp>
-      <p:sp>
-        <p:nvSpPr>
-          <p:cNvPr id="10" name="TextBox 9"/>
+          <p:cNvPr id="11" name="번호 2"/>
           <p:cNvSpPr txBox="1"/>
           <p:nvPr/>
         </p:nvSpPr>
         <p:spPr>
           <a:xfrm>
-            <a:off x="3630853" y="2331720"/>
-            <a:ext cx="2213533" cy="640080"/>
+            <a:off x="3516553" y="1920240"/>
+            <a:ext cx="914400" cy="548640"/>
           </a:xfrm>
           <a:prstGeom prst="rect">
             <a:avLst/>
@@ -4903,9 +5136,47 @@
               </a:lnSpc>
             </a:pPr>
             <a:r>
+              <a:rPr sz="2400" b="1" i="0">
+                <a:solidFill>
+                  <a:srgbClr val="D8B879"/>
+                </a:solidFill>
+              </a:rPr>
+              <a:t>02</a:t>
+            </a:r>
+          </a:p>
+        </p:txBody>
+      </p:sp>
+      <p:sp>
+        <p:nvSpPr>
+          <p:cNvPr id="12" name="TextBox 11"/>
+          <p:cNvSpPr txBox="1"/>
+          <p:nvPr/>
+        </p:nvSpPr>
+        <p:spPr>
+          <a:xfrm>
+            <a:off x="3562273" y="2560320"/>
+            <a:ext cx="2282113" cy="640080"/>
+          </a:xfrm>
+          <a:prstGeom prst="rect">
+            <a:avLst/>
+          </a:prstGeom>
+          <a:noFill/>
+        </p:spPr>
+        <p:txBody>
+          <a:bodyPr wrap="square" lIns="54864" rIns="54864" tIns="27432" bIns="27432" anchor="ctr">
+            <a:noAutofit/>
+          </a:bodyPr>
+          <a:lstStyle/>
+          <a:p>
+            <a:pPr algn="l">
+              <a:lnSpc>
+                <a:spcPct val="115000"/>
+              </a:lnSpc>
+            </a:pPr>
+            <a:r>
               <a:rPr sz="1800" b="1" i="0">
                 <a:solidFill>
-                  <a:srgbClr val="715214"/>
+                  <a:srgbClr val="493E27"/>
                 </a:solidFill>
               </a:rPr>
               <a:t>첫 선물</a:t>
@@ -4915,14 +5186,14 @@
       </p:sp>
       <p:sp>
         <p:nvSpPr>
-          <p:cNvPr id="11" name="TextBox 10"/>
+          <p:cNvPr id="13" name="TextBox 12"/>
           <p:cNvSpPr txBox="1"/>
           <p:nvPr/>
         </p:nvSpPr>
         <p:spPr>
           <a:xfrm>
-            <a:off x="3630853" y="3017520"/>
-            <a:ext cx="2213533" cy="3063239"/>
+            <a:off x="3562273" y="3246120"/>
+            <a:ext cx="2282113" cy="2971800"/>
           </a:xfrm>
           <a:prstGeom prst="rect">
             <a:avLst/>
@@ -4943,7 +5214,7 @@
             <a:r>
               <a:rPr sz="1500" b="0" i="0">
                 <a:solidFill>
-                  <a:srgbClr val="2B2B2B"/>
+                  <a:srgbClr val="26231F"/>
                 </a:solidFill>
               </a:rPr>
               <a:t>무엇이었나요?</a:t>
@@ -4953,26 +5224,24 @@
       </p:sp>
       <p:sp>
         <p:nvSpPr>
-          <p:cNvPr id="12" name="카드 3"/>
+          <p:cNvPr id="14" name="카드 3"/>
           <p:cNvSpPr/>
           <p:nvPr/>
         </p:nvSpPr>
         <p:spPr>
           <a:xfrm>
-            <a:off x="6210147" y="1554480"/>
-            <a:ext cx="2487853" cy="4663440"/>
+            <a:off x="6210147" y="1783080"/>
+            <a:ext cx="2556433" cy="4572000"/>
           </a:xfrm>
           <a:prstGeom prst="roundRect">
             <a:avLst>
-              <a:gd name="adj" fmla="val 8000"/>
+              <a:gd name="adj" fmla="val 7000"/>
             </a:avLst>
           </a:prstGeom>
-          <a:solidFill>
-            <a:srgbClr val="FCF7EE"/>
-          </a:solidFill>
+          <a:noFill/>
           <a:ln w="15875">
             <a:solidFill>
-              <a:srgbClr val="F7E8C9"/>
+              <a:srgbClr val="D8B879"/>
             </a:solidFill>
           </a:ln>
         </p:spPr>
@@ -4986,57 +5255,14 @@
       </p:sp>
       <p:sp>
         <p:nvSpPr>
-          <p:cNvPr id="13" name="번호 3"/>
-          <p:cNvSpPr/>
-          <p:nvPr/>
-        </p:nvSpPr>
-        <p:spPr>
-          <a:xfrm>
-            <a:off x="6393027" y="1737360"/>
-            <a:ext cx="457200" cy="457200"/>
-          </a:xfrm>
-          <a:prstGeom prst="ellipse">
-            <a:avLst/>
-          </a:prstGeom>
-          <a:solidFill>
-            <a:srgbClr val="C79123"/>
-          </a:solidFill>
-          <a:ln>
-            <a:noFill/>
-          </a:ln>
-        </p:spPr>
-        <p:txBody>
-          <a:bodyPr rtlCol="0" anchor="ctr" wrap="square" lIns="54864" rIns="54864" tIns="27432" bIns="27432">
-            <a:noAutofit/>
-          </a:bodyPr>
-          <a:lstStyle/>
-          <a:p>
-            <a:pPr algn="ctr">
-              <a:lnSpc>
-                <a:spcPct val="100000"/>
-              </a:lnSpc>
-            </a:pPr>
-            <a:r>
-              <a:rPr sz="1600" b="1" i="0">
-                <a:solidFill>
-                  <a:srgbClr val="FFFFFF"/>
-                </a:solidFill>
-              </a:rPr>
-              <a:t>3</a:t>
-            </a:r>
-          </a:p>
-        </p:txBody>
-      </p:sp>
-      <p:sp>
-        <p:nvSpPr>
-          <p:cNvPr id="14" name="TextBox 13"/>
+          <p:cNvPr id="15" name="번호 3"/>
           <p:cNvSpPr txBox="1"/>
           <p:nvPr/>
         </p:nvSpPr>
         <p:spPr>
           <a:xfrm>
-            <a:off x="6347307" y="2331720"/>
-            <a:ext cx="2213533" cy="640080"/>
+            <a:off x="6301587" y="1920240"/>
+            <a:ext cx="914400" cy="548640"/>
           </a:xfrm>
           <a:prstGeom prst="rect">
             <a:avLst/>
@@ -5055,9 +5281,47 @@
               </a:lnSpc>
             </a:pPr>
             <a:r>
+              <a:rPr sz="2400" b="1" i="0">
+                <a:solidFill>
+                  <a:srgbClr val="D8B879"/>
+                </a:solidFill>
+              </a:rPr>
+              <a:t>03</a:t>
+            </a:r>
+          </a:p>
+        </p:txBody>
+      </p:sp>
+      <p:sp>
+        <p:nvSpPr>
+          <p:cNvPr id="16" name="TextBox 15"/>
+          <p:cNvSpPr txBox="1"/>
+          <p:nvPr/>
+        </p:nvSpPr>
+        <p:spPr>
+          <a:xfrm>
+            <a:off x="6347307" y="2560320"/>
+            <a:ext cx="2282113" cy="640080"/>
+          </a:xfrm>
+          <a:prstGeom prst="rect">
+            <a:avLst/>
+          </a:prstGeom>
+          <a:noFill/>
+        </p:spPr>
+        <p:txBody>
+          <a:bodyPr wrap="square" lIns="54864" rIns="54864" tIns="27432" bIns="27432" anchor="ctr">
+            <a:noAutofit/>
+          </a:bodyPr>
+          <a:lstStyle/>
+          <a:p>
+            <a:pPr algn="l">
+              <a:lnSpc>
+                <a:spcPct val="115000"/>
+              </a:lnSpc>
+            </a:pPr>
+            <a:r>
               <a:rPr sz="1800" b="1" i="0">
                 <a:solidFill>
-                  <a:srgbClr val="715214"/>
+                  <a:srgbClr val="493E27"/>
                 </a:solidFill>
               </a:rPr>
               <a:t>첫 다툼</a:t>
@@ -5067,14 +5331,14 @@
       </p:sp>
       <p:sp>
         <p:nvSpPr>
-          <p:cNvPr id="15" name="TextBox 14"/>
+          <p:cNvPr id="17" name="TextBox 16"/>
           <p:cNvSpPr txBox="1"/>
           <p:nvPr/>
         </p:nvSpPr>
         <p:spPr>
           <a:xfrm>
-            <a:off x="6347307" y="3017520"/>
-            <a:ext cx="2213533" cy="3063239"/>
+            <a:off x="6347307" y="3246120"/>
+            <a:ext cx="2282113" cy="2971800"/>
           </a:xfrm>
           <a:prstGeom prst="rect">
             <a:avLst/>
@@ -5095,7 +5359,7 @@
             <a:r>
               <a:rPr sz="1500" b="0" i="0">
                 <a:solidFill>
-                  <a:srgbClr val="2B2B2B"/>
+                  <a:srgbClr val="26231F"/>
                 </a:solidFill>
               </a:rPr>
               <a:t>어떻게 풀었나요?</a:t>
@@ -5105,26 +5369,24 @@
       </p:sp>
       <p:sp>
         <p:nvSpPr>
-          <p:cNvPr id="16" name="카드 4"/>
+          <p:cNvPr id="18" name="카드 4"/>
           <p:cNvSpPr/>
           <p:nvPr/>
         </p:nvSpPr>
         <p:spPr>
           <a:xfrm>
-            <a:off x="8926601" y="1554480"/>
-            <a:ext cx="2487853" cy="4663440"/>
+            <a:off x="8995181" y="1783080"/>
+            <a:ext cx="2556433" cy="4572000"/>
           </a:xfrm>
           <a:prstGeom prst="roundRect">
             <a:avLst>
-              <a:gd name="adj" fmla="val 8000"/>
+              <a:gd name="adj" fmla="val 7000"/>
             </a:avLst>
           </a:prstGeom>
-          <a:solidFill>
-            <a:srgbClr val="FCF7EE"/>
-          </a:solidFill>
+          <a:noFill/>
           <a:ln w="15875">
             <a:solidFill>
-              <a:srgbClr val="F7E8C9"/>
+              <a:srgbClr val="D8B879"/>
             </a:solidFill>
           </a:ln>
         </p:spPr>
@@ -5138,57 +5400,14 @@
       </p:sp>
       <p:sp>
         <p:nvSpPr>
-          <p:cNvPr id="17" name="번호 4"/>
-          <p:cNvSpPr/>
-          <p:nvPr/>
-        </p:nvSpPr>
-        <p:spPr>
-          <a:xfrm>
-            <a:off x="9109481" y="1737360"/>
-            <a:ext cx="457200" cy="457200"/>
-          </a:xfrm>
-          <a:prstGeom prst="ellipse">
-            <a:avLst/>
-          </a:prstGeom>
-          <a:solidFill>
-            <a:srgbClr val="C79123"/>
-          </a:solidFill>
-          <a:ln>
-            <a:noFill/>
-          </a:ln>
-        </p:spPr>
-        <p:txBody>
-          <a:bodyPr rtlCol="0" anchor="ctr" wrap="square" lIns="54864" rIns="54864" tIns="27432" bIns="27432">
-            <a:noAutofit/>
-          </a:bodyPr>
-          <a:lstStyle/>
-          <a:p>
-            <a:pPr algn="ctr">
-              <a:lnSpc>
-                <a:spcPct val="100000"/>
-              </a:lnSpc>
-            </a:pPr>
-            <a:r>
-              <a:rPr sz="1600" b="1" i="0">
-                <a:solidFill>
-                  <a:srgbClr val="FFFFFF"/>
-                </a:solidFill>
-              </a:rPr>
-              <a:t>4</a:t>
-            </a:r>
-          </a:p>
-        </p:txBody>
-      </p:sp>
-      <p:sp>
-        <p:nvSpPr>
-          <p:cNvPr id="18" name="TextBox 17"/>
+          <p:cNvPr id="19" name="번호 4"/>
           <p:cNvSpPr txBox="1"/>
           <p:nvPr/>
         </p:nvSpPr>
         <p:spPr>
           <a:xfrm>
-            <a:off x="9063761" y="2331720"/>
-            <a:ext cx="2213533" cy="640080"/>
+            <a:off x="9086621" y="1920240"/>
+            <a:ext cx="914400" cy="548640"/>
           </a:xfrm>
           <a:prstGeom prst="rect">
             <a:avLst/>
@@ -5207,9 +5426,47 @@
               </a:lnSpc>
             </a:pPr>
             <a:r>
+              <a:rPr sz="2400" b="1" i="0">
+                <a:solidFill>
+                  <a:srgbClr val="D8B879"/>
+                </a:solidFill>
+              </a:rPr>
+              <a:t>04</a:t>
+            </a:r>
+          </a:p>
+        </p:txBody>
+      </p:sp>
+      <p:sp>
+        <p:nvSpPr>
+          <p:cNvPr id="20" name="TextBox 19"/>
+          <p:cNvSpPr txBox="1"/>
+          <p:nvPr/>
+        </p:nvSpPr>
+        <p:spPr>
+          <a:xfrm>
+            <a:off x="9132341" y="2560320"/>
+            <a:ext cx="2282113" cy="640080"/>
+          </a:xfrm>
+          <a:prstGeom prst="rect">
+            <a:avLst/>
+          </a:prstGeom>
+          <a:noFill/>
+        </p:spPr>
+        <p:txBody>
+          <a:bodyPr wrap="square" lIns="54864" rIns="54864" tIns="27432" bIns="27432" anchor="ctr">
+            <a:noAutofit/>
+          </a:bodyPr>
+          <a:lstStyle/>
+          <a:p>
+            <a:pPr algn="l">
+              <a:lnSpc>
+                <a:spcPct val="115000"/>
+              </a:lnSpc>
+            </a:pPr>
+            <a:r>
               <a:rPr sz="1800" b="1" i="0">
                 <a:solidFill>
-                  <a:srgbClr val="715214"/>
+                  <a:srgbClr val="493E27"/>
                 </a:solidFill>
               </a:rPr>
               <a:t>첫 약속</a:t>
@@ -5219,14 +5476,14 @@
       </p:sp>
       <p:sp>
         <p:nvSpPr>
-          <p:cNvPr id="19" name="TextBox 18"/>
+          <p:cNvPr id="21" name="TextBox 20"/>
           <p:cNvSpPr txBox="1"/>
           <p:nvPr/>
         </p:nvSpPr>
         <p:spPr>
           <a:xfrm>
-            <a:off x="9063761" y="3017520"/>
-            <a:ext cx="2213533" cy="3063239"/>
+            <a:off x="9132341" y="3246120"/>
+            <a:ext cx="2282113" cy="2971800"/>
           </a:xfrm>
           <a:prstGeom prst="rect">
             <a:avLst/>
@@ -5247,7 +5504,7 @@
             <a:r>
               <a:rPr sz="1500" b="0" i="0">
                 <a:solidFill>
-                  <a:srgbClr val="2B2B2B"/>
+                  <a:srgbClr val="26231F"/>
                 </a:solidFill>
               </a:rPr>
               <a:t>무엇이었나요?</a:t>
@@ -5269,7 +5526,7 @@
     <p:bg>
       <p:bgPr>
         <a:solidFill>
-          <a:srgbClr val="F7E8C9"/>
+          <a:srgbClr val="FFFFFF"/>
         </a:solidFill>
         <a:effectLst/>
       </p:bgPr>
@@ -5283,26 +5540,52 @@
       <p:grpSpPr/>
       <p:sp>
         <p:nvSpPr>
-          <p:cNvPr id="3" name="장식"/>
+          <p:cNvPr id="3" name="포인트"/>
           <p:cNvSpPr/>
           <p:nvPr/>
         </p:nvSpPr>
         <p:spPr>
-          <a:xfrm>
-            <a:off x="274320" y="274320"/>
-            <a:ext cx="11643055" cy="6309360"/>
+          <a:xfrm rot="18900000">
+            <a:off x="5958687" y="246888"/>
+            <a:ext cx="274320" cy="274320"/>
+          </a:xfrm>
+          <a:prstGeom prst="teardrop">
+            <a:avLst/>
+          </a:prstGeom>
+          <a:solidFill>
+            <a:srgbClr val="D8B879"/>
+          </a:solidFill>
+          <a:ln>
+            <a:noFill/>
+          </a:ln>
+        </p:spPr>
+        <p:txBody>
+          <a:bodyPr rtlCol="0" anchor="ctr"/>
+          <a:lstStyle/>
+          <a:p>
+            <a:pPr algn="ctr"/>
+          </a:p>
+        </p:txBody>
+      </p:sp>
+      <p:sp>
+        <p:nvSpPr>
+          <p:cNvPr id="4" name="장식"/>
+          <p:cNvSpPr/>
+          <p:nvPr/>
+        </p:nvSpPr>
+        <p:spPr>
+          <a:xfrm>
+            <a:off x="5684367" y="1572768"/>
+            <a:ext cx="822960" cy="22860"/>
           </a:xfrm>
           <a:prstGeom prst="rect">
             <a:avLst/>
           </a:prstGeom>
           <a:solidFill>
-            <a:srgbClr val="FFFFFF"/>
+            <a:srgbClr val="D8B879"/>
           </a:solidFill>
-          <a:ln w="25400">
-            <a:solidFill>
-              <a:srgbClr val="C79123"/>
-            </a:solidFill>
-            <a:prstDash val="dash"/>
+          <a:ln>
+            <a:noFill/>
           </a:ln>
         </p:spPr>
         <p:txBody>
@@ -5315,19 +5598,19 @@
       </p:sp>
       <p:sp>
         <p:nvSpPr>
-          <p:cNvPr id="2" name="Title 1"/>
-          <p:cNvSpPr>
-            <a:spLocks noGrp="1"/>
-          </p:cNvSpPr>
-          <p:nvPr>
-            <p:ph type="title"/>
-          </p:nvPr>
-        </p:nvSpPr>
-        <p:spPr>
-          <a:xfrm>
-            <a:off x="777240" y="548640"/>
-            <a:ext cx="9357055" cy="822960"/>
-          </a:xfrm>
+          <p:cNvPr id="5" name="상단 라벨"/>
+          <p:cNvSpPr txBox="1"/>
+          <p:nvPr/>
+        </p:nvSpPr>
+        <p:spPr>
+          <a:xfrm>
+            <a:off x="640080" y="182880"/>
+            <a:ext cx="3657600" cy="274320"/>
+          </a:xfrm>
+          <a:prstGeom prst="rect">
+            <a:avLst/>
+          </a:prstGeom>
+          <a:noFill/>
         </p:spPr>
         <p:txBody>
           <a:bodyPr wrap="square" lIns="54864" rIns="54864" tIns="27432" bIns="27432" anchor="ctr">
@@ -5336,6 +5619,44 @@
           <a:lstStyle/>
           <a:p>
             <a:pPr algn="l">
+              <a:lnSpc>
+                <a:spcPct val="115000"/>
+              </a:lnSpc>
+            </a:pPr>
+            <a:r>
+              <a:rPr sz="800" b="1" i="0" spc="250">
+                <a:solidFill>
+                  <a:srgbClr val="8E8780"/>
+                </a:solidFill>
+              </a:rPr>
+              <a:t>WEDDING</a:t>
+            </a:r>
+          </a:p>
+        </p:txBody>
+      </p:sp>
+      <p:sp>
+        <p:nvSpPr>
+          <p:cNvPr id="2" name="Title 1"/>
+          <p:cNvSpPr>
+            <a:spLocks noGrp="1"/>
+          </p:cNvSpPr>
+          <p:nvPr>
+            <p:ph type="title"/>
+          </p:nvPr>
+        </p:nvSpPr>
+        <p:spPr>
+          <a:xfrm>
+            <a:off x="1371600" y="640080"/>
+            <a:ext cx="9448495" cy="868680"/>
+          </a:xfrm>
+        </p:spPr>
+        <p:txBody>
+          <a:bodyPr wrap="square" lIns="54864" rIns="54864" tIns="27432" bIns="27432" anchor="ctr">
+            <a:noAutofit/>
+          </a:bodyPr>
+          <a:lstStyle/>
+          <a:p>
+            <a:pPr algn="ctr">
               <a:lnSpc>
                 <a:spcPct val="105000"/>
               </a:lnSpc>
@@ -5343,7 +5664,7 @@
             <a:r>
               <a:rPr sz="3000" b="1" i="0">
                 <a:solidFill>
-                  <a:srgbClr val="715214"/>
+                  <a:srgbClr val="26231F"/>
                 </a:solidFill>
               </a:rPr>
               <a:t>웨딩 사진</a:t>
@@ -5353,14 +5674,14 @@
       </p:sp>
       <p:sp>
         <p:nvSpPr>
-          <p:cNvPr id="4" name="사진 자리"/>
+          <p:cNvPr id="6" name="사진 자리"/>
           <p:cNvSpPr/>
           <p:nvPr/>
         </p:nvSpPr>
         <p:spPr>
           <a:xfrm>
-            <a:off x="777240" y="1554480"/>
-            <a:ext cx="3423818" cy="2240279"/>
+            <a:off x="640080" y="1783080"/>
+            <a:ext cx="3515258" cy="2194560"/>
           </a:xfrm>
           <a:prstGeom prst="roundRect">
             <a:avLst>
@@ -5368,12 +5689,10 @@
             </a:avLst>
           </a:prstGeom>
           <a:solidFill>
-            <a:srgbClr val="F7E8C9"/>
+            <a:srgbClr val="F6EBD5"/>
           </a:solidFill>
           <a:ln w="19050">
-            <a:solidFill>
-              <a:srgbClr val="C79123"/>
-            </a:solidFill>
+            <a:noFill/>
             <a:prstDash val="dash"/>
           </a:ln>
         </p:spPr>
@@ -5391,7 +5710,7 @@
             <a:r>
               <a:rPr sz="1200" b="0" i="0">
                 <a:solidFill>
-                  <a:srgbClr val="715214"/>
+                  <a:srgbClr val="8E8780"/>
                 </a:solidFill>
               </a:rPr>
               <a:t>사진 1</a:t>
@@ -5401,14 +5720,14 @@
       </p:sp>
       <p:sp>
         <p:nvSpPr>
-          <p:cNvPr id="5" name="사진 자리"/>
+          <p:cNvPr id="7" name="사진 자리"/>
           <p:cNvSpPr/>
           <p:nvPr/>
         </p:nvSpPr>
         <p:spPr>
           <a:xfrm>
-            <a:off x="4383938" y="1554480"/>
-            <a:ext cx="3423818" cy="2240279"/>
+            <a:off x="4338218" y="1783080"/>
+            <a:ext cx="3515258" cy="2194560"/>
           </a:xfrm>
           <a:prstGeom prst="roundRect">
             <a:avLst>
@@ -5416,12 +5735,10 @@
             </a:avLst>
           </a:prstGeom>
           <a:solidFill>
-            <a:srgbClr val="F7E8C9"/>
+            <a:srgbClr val="F6EBD5"/>
           </a:solidFill>
           <a:ln w="19050">
-            <a:solidFill>
-              <a:srgbClr val="C79123"/>
-            </a:solidFill>
+            <a:noFill/>
             <a:prstDash val="dash"/>
           </a:ln>
         </p:spPr>
@@ -5439,7 +5756,7 @@
             <a:r>
               <a:rPr sz="1200" b="0" i="0">
                 <a:solidFill>
-                  <a:srgbClr val="715214"/>
+                  <a:srgbClr val="8E8780"/>
                 </a:solidFill>
               </a:rPr>
               <a:t>사진 2</a:t>
@@ -5449,14 +5766,14 @@
       </p:sp>
       <p:sp>
         <p:nvSpPr>
-          <p:cNvPr id="6" name="사진 자리"/>
+          <p:cNvPr id="8" name="사진 자리"/>
           <p:cNvSpPr/>
           <p:nvPr/>
         </p:nvSpPr>
         <p:spPr>
           <a:xfrm>
-            <a:off x="7990636" y="1554480"/>
-            <a:ext cx="3423818" cy="2240279"/>
+            <a:off x="8036356" y="1783080"/>
+            <a:ext cx="3515258" cy="2194560"/>
           </a:xfrm>
           <a:prstGeom prst="roundRect">
             <a:avLst>
@@ -5464,12 +5781,10 @@
             </a:avLst>
           </a:prstGeom>
           <a:solidFill>
-            <a:srgbClr val="F7E8C9"/>
+            <a:srgbClr val="F6EBD5"/>
           </a:solidFill>
           <a:ln w="19050">
-            <a:solidFill>
-              <a:srgbClr val="C79123"/>
-            </a:solidFill>
+            <a:noFill/>
             <a:prstDash val="dash"/>
           </a:ln>
         </p:spPr>
@@ -5487,7 +5802,7 @@
             <a:r>
               <a:rPr sz="1200" b="0" i="0">
                 <a:solidFill>
-                  <a:srgbClr val="715214"/>
+                  <a:srgbClr val="8E8780"/>
                 </a:solidFill>
               </a:rPr>
               <a:t>사진 3</a:t>
@@ -5497,14 +5812,14 @@
       </p:sp>
       <p:sp>
         <p:nvSpPr>
-          <p:cNvPr id="7" name="사진 자리"/>
+          <p:cNvPr id="9" name="사진 자리"/>
           <p:cNvSpPr/>
           <p:nvPr/>
         </p:nvSpPr>
         <p:spPr>
           <a:xfrm>
-            <a:off x="777240" y="3977639"/>
-            <a:ext cx="3423818" cy="2240279"/>
+            <a:off x="640080" y="4160520"/>
+            <a:ext cx="3515258" cy="2194560"/>
           </a:xfrm>
           <a:prstGeom prst="roundRect">
             <a:avLst>
@@ -5512,12 +5827,10 @@
             </a:avLst>
           </a:prstGeom>
           <a:solidFill>
-            <a:srgbClr val="F7E8C9"/>
+            <a:srgbClr val="F6EBD5"/>
           </a:solidFill>
           <a:ln w="19050">
-            <a:solidFill>
-              <a:srgbClr val="C79123"/>
-            </a:solidFill>
+            <a:noFill/>
             <a:prstDash val="dash"/>
           </a:ln>
         </p:spPr>
@@ -5535,7 +5848,7 @@
             <a:r>
               <a:rPr sz="1200" b="0" i="0">
                 <a:solidFill>
-                  <a:srgbClr val="715214"/>
+                  <a:srgbClr val="8E8780"/>
                 </a:solidFill>
               </a:rPr>
               <a:t>사진 4</a:t>
@@ -5545,14 +5858,14 @@
       </p:sp>
       <p:sp>
         <p:nvSpPr>
-          <p:cNvPr id="8" name="사진 자리"/>
+          <p:cNvPr id="10" name="사진 자리"/>
           <p:cNvSpPr/>
           <p:nvPr/>
         </p:nvSpPr>
         <p:spPr>
           <a:xfrm>
-            <a:off x="4383938" y="3977639"/>
-            <a:ext cx="3423818" cy="2240279"/>
+            <a:off x="4338218" y="4160520"/>
+            <a:ext cx="3515258" cy="2194560"/>
           </a:xfrm>
           <a:prstGeom prst="roundRect">
             <a:avLst>
@@ -5560,12 +5873,10 @@
             </a:avLst>
           </a:prstGeom>
           <a:solidFill>
-            <a:srgbClr val="F7E8C9"/>
+            <a:srgbClr val="F6EBD5"/>
           </a:solidFill>
           <a:ln w="19050">
-            <a:solidFill>
-              <a:srgbClr val="C79123"/>
-            </a:solidFill>
+            <a:noFill/>
             <a:prstDash val="dash"/>
           </a:ln>
         </p:spPr>
@@ -5583,7 +5894,7 @@
             <a:r>
               <a:rPr sz="1200" b="0" i="0">
                 <a:solidFill>
-                  <a:srgbClr val="715214"/>
+                  <a:srgbClr val="8E8780"/>
                 </a:solidFill>
               </a:rPr>
               <a:t>사진 5</a:t>
@@ -5593,14 +5904,14 @@
       </p:sp>
       <p:sp>
         <p:nvSpPr>
-          <p:cNvPr id="9" name="사진 자리"/>
+          <p:cNvPr id="11" name="사진 자리"/>
           <p:cNvSpPr/>
           <p:nvPr/>
         </p:nvSpPr>
         <p:spPr>
           <a:xfrm>
-            <a:off x="7990636" y="3977639"/>
-            <a:ext cx="3423818" cy="2240279"/>
+            <a:off x="8036356" y="4160520"/>
+            <a:ext cx="3515258" cy="2194560"/>
           </a:xfrm>
           <a:prstGeom prst="roundRect">
             <a:avLst>
@@ -5608,12 +5919,10 @@
             </a:avLst>
           </a:prstGeom>
           <a:solidFill>
-            <a:srgbClr val="F7E8C9"/>
+            <a:srgbClr val="F6EBD5"/>
           </a:solidFill>
           <a:ln w="19050">
-            <a:solidFill>
-              <a:srgbClr val="C79123"/>
-            </a:solidFill>
+            <a:noFill/>
             <a:prstDash val="dash"/>
           </a:ln>
         </p:spPr>
@@ -5631,7 +5940,7 @@
             <a:r>
               <a:rPr sz="1200" b="0" i="0">
                 <a:solidFill>
-                  <a:srgbClr val="715214"/>
+                  <a:srgbClr val="8E8780"/>
                 </a:solidFill>
               </a:rPr>
               <a:t>사진 6</a:t>
@@ -5650,6 +5959,14 @@
 <file path=ppt/slides/slide6.xml><?xml version="1.0" encoding="utf-8"?>
 <p:sld xmlns:a="http://schemas.openxmlformats.org/drawingml/2006/main" xmlns:p="http://schemas.openxmlformats.org/presentationml/2006/main" xmlns:r="http://schemas.openxmlformats.org/officeDocument/2006/relationships">
   <p:cSld>
+    <p:bg>
+      <p:bgPr>
+        <a:solidFill>
+          <a:srgbClr val="FBF6EC"/>
+        </a:solidFill>
+        <a:effectLst/>
+      </p:bgPr>
+    </p:bg>
     <p:spTree>
       <p:nvGrpSpPr>
         <p:cNvPr id="1" name=""/>
@@ -5657,30 +5974,119 @@
         <p:nvPr/>
       </p:nvGrpSpPr>
       <p:grpSpPr/>
-      <p:pic>
-        <p:nvPicPr>
-          <p:cNvPr id="3" name="표지 그림" descr="wedding-27.jpg"/>
-          <p:cNvPicPr>
-            <a:picLocks noChangeAspect="1"/>
-          </p:cNvPicPr>
-          <p:nvPr/>
-        </p:nvPicPr>
-        <p:blipFill>
-          <a:blip r:embed="rId2"/>
-          <a:stretch>
-            <a:fillRect/>
-          </a:stretch>
-        </p:blipFill>
-        <p:spPr>
-          <a:xfrm>
-            <a:off x="0" y="0"/>
-            <a:ext cx="12191695" cy="6858000"/>
+      <p:sp>
+        <p:nvSpPr>
+          <p:cNvPr id="3" name="사진 자리"/>
+          <p:cNvSpPr/>
+          <p:nvPr/>
+        </p:nvSpPr>
+        <p:spPr>
+          <a:xfrm>
+            <a:off x="1463003" y="685800"/>
+            <a:ext cx="3169840" cy="5486400"/>
+          </a:xfrm>
+          <a:prstGeom prst="round2SameRect">
+            <a:avLst>
+              <a:gd name="adj1" fmla="val 50000"/>
+              <a:gd name="adj2" fmla="val 0"/>
+            </a:avLst>
+          </a:prstGeom>
+          <a:solidFill>
+            <a:srgbClr val="EBD6AD"/>
+          </a:solidFill>
+          <a:ln>
+            <a:noFill/>
+          </a:ln>
+        </p:spPr>
+        <p:txBody>
+          <a:bodyPr rtlCol="0" anchor="ctr" wrap="square" lIns="54864" rIns="54864" tIns="27432" bIns="27432">
+            <a:noAutofit/>
+          </a:bodyPr>
+          <a:lstStyle/>
+          <a:p>
+            <a:pPr algn="ctr">
+              <a:lnSpc>
+                <a:spcPct val="100000"/>
+              </a:lnSpc>
+            </a:pPr>
+            <a:r>
+              <a:rPr sz="1400" b="0" i="0">
+                <a:solidFill>
+                  <a:srgbClr val="493E27"/>
+                </a:solidFill>
+              </a:rPr>
+              <a:t>사진을 넣어 주세요</a:t>
+            </a:r>
+          </a:p>
+        </p:txBody>
+      </p:sp>
+      <p:sp>
+        <p:nvSpPr>
+          <p:cNvPr id="4" name="장식"/>
+          <p:cNvSpPr/>
+          <p:nvPr/>
+        </p:nvSpPr>
+        <p:spPr>
+          <a:xfrm>
+            <a:off x="4358505" y="4251960"/>
+            <a:ext cx="1005840" cy="1005840"/>
+          </a:xfrm>
+          <a:prstGeom prst="ellipse">
+            <a:avLst/>
+          </a:prstGeom>
+          <a:solidFill>
+            <a:srgbClr val="EBD6AD"/>
+          </a:solidFill>
+          <a:ln>
+            <a:noFill/>
+          </a:ln>
+        </p:spPr>
+        <p:txBody>
+          <a:bodyPr rtlCol="0" anchor="ctr"/>
+          <a:lstStyle/>
+          <a:p>
+            <a:pPr algn="ctr"/>
+          </a:p>
+        </p:txBody>
+      </p:sp>
+      <p:sp>
+        <p:nvSpPr>
+          <p:cNvPr id="5" name="라벨"/>
+          <p:cNvSpPr txBox="1"/>
+          <p:nvPr/>
+        </p:nvSpPr>
+        <p:spPr>
+          <a:xfrm>
+            <a:off x="6827349" y="2148840"/>
+            <a:ext cx="4632844" cy="274320"/>
           </a:xfrm>
           <a:prstGeom prst="rect">
             <a:avLst/>
           </a:prstGeom>
-        </p:spPr>
-      </p:pic>
+          <a:noFill/>
+        </p:spPr>
+        <p:txBody>
+          <a:bodyPr wrap="square" lIns="54864" rIns="54864" tIns="27432" bIns="27432" anchor="t">
+            <a:noAutofit/>
+          </a:bodyPr>
+          <a:lstStyle/>
+          <a:p>
+            <a:pPr algn="l">
+              <a:lnSpc>
+                <a:spcPct val="115000"/>
+              </a:lnSpc>
+            </a:pPr>
+            <a:r>
+              <a:rPr sz="1000" b="1" i="0" spc="250">
+                <a:solidFill>
+                  <a:srgbClr val="26231F"/>
+                </a:solidFill>
+              </a:rPr>
+              <a:t>WEDDING</a:t>
+            </a:r>
+          </a:p>
+        </p:txBody>
+      </p:sp>
       <p:sp>
         <p:nvSpPr>
           <p:cNvPr id="2" name="Title 1"/>
@@ -5693,8 +6099,8 @@
         </p:nvSpPr>
         <p:spPr>
           <a:xfrm>
-            <a:off x="853418" y="2057400"/>
-            <a:ext cx="6095847" cy="1554480"/>
+            <a:off x="6827349" y="2606040"/>
+            <a:ext cx="4632844" cy="1188720"/>
           </a:xfrm>
         </p:spPr>
         <p:txBody>
@@ -5711,7 +6117,7 @@
             <a:r>
               <a:rPr sz="3400" b="1" i="0">
                 <a:solidFill>
-                  <a:srgbClr val="715214"/>
+                  <a:srgbClr val="26231F"/>
                 </a:solidFill>
               </a:rPr>
               <a:t>와 주셔서 고맙습니다</a:t>
@@ -5721,14 +6127,14 @@
       </p:sp>
       <p:sp>
         <p:nvSpPr>
-          <p:cNvPr id="4" name="한 줄 문구"/>
+          <p:cNvPr id="6" name="한 줄 문구"/>
           <p:cNvSpPr txBox="1"/>
           <p:nvPr/>
         </p:nvSpPr>
         <p:spPr>
           <a:xfrm>
-            <a:off x="853418" y="3749039"/>
-            <a:ext cx="6095847" cy="822960"/>
+            <a:off x="6827349" y="3886200"/>
+            <a:ext cx="4632844" cy="822960"/>
           </a:xfrm>
           <a:prstGeom prst="rect">
             <a:avLst/>
@@ -5747,9 +6153,9 @@
               </a:lnSpc>
             </a:pPr>
             <a:r>
-              <a:rPr sz="1700" b="0" i="1">
-                <a:solidFill>
-                  <a:srgbClr val="715214"/>
+              <a:rPr sz="1700" b="0" i="0">
+                <a:solidFill>
+                  <a:srgbClr val="26231F"/>
                 </a:solidFill>
               </a:rPr>
               <a:t>잘 살겠습니다</a:t>
@@ -5759,14 +6165,14 @@
       </p:sp>
       <p:sp>
         <p:nvSpPr>
-          <p:cNvPr id="5" name="안내 문구"/>
+          <p:cNvPr id="7" name="안내 문구"/>
           <p:cNvSpPr txBox="1"/>
           <p:nvPr/>
         </p:nvSpPr>
         <p:spPr>
           <a:xfrm>
-            <a:off x="853418" y="4617720"/>
-            <a:ext cx="6095847" cy="914400"/>
+            <a:off x="6827349" y="4754880"/>
+            <a:ext cx="4632844" cy="914400"/>
           </a:xfrm>
           <a:prstGeom prst="rect">
             <a:avLst/>
@@ -5787,7 +6193,7 @@
             <a:r>
               <a:rPr sz="1400" b="0" i="0">
                 <a:solidFill>
-                  <a:srgbClr val="666666"/>
+                  <a:srgbClr val="26231F"/>
                 </a:solidFill>
               </a:rPr>
               <a:t>신랑 이름 ♥ 신부 이름</a:t>
@@ -5814,34 +6220,34 @@
         <a:sysClr val="window" lastClr="FFFFFF"/>
       </a:lt1>
       <a:dk2>
-        <a:srgbClr val="715214"/>
+        <a:srgbClr val="493E27"/>
       </a:dk2>
       <a:lt2>
-        <a:srgbClr val="FCF7EE"/>
+        <a:srgbClr val="FBF6EC"/>
       </a:lt2>
       <a:accent1>
-        <a:srgbClr val="C79123"/>
+        <a:srgbClr val="D8B879"/>
       </a:accent1>
       <a:accent2>
-        <a:srgbClr val="3B8391"/>
+        <a:srgbClr val="D7E198"/>
       </a:accent2>
       <a:accent3>
-        <a:srgbClr val="715214"/>
+        <a:srgbClr val="493E27"/>
       </a:accent3>
       <a:accent4>
-        <a:srgbClr val="F7E8C9"/>
+        <a:srgbClr val="F6EBD5"/>
       </a:accent4>
       <a:accent5>
-        <a:srgbClr val="818A5A"/>
+        <a:srgbClr val="D8CC88"/>
       </a:accent5>
       <a:accent6>
-        <a:srgbClr val="AA9772"/>
+        <a:srgbClr val="928B7D"/>
       </a:accent6>
       <a:hlink>
-        <a:srgbClr val="C79123"/>
+        <a:srgbClr val="D8B879"/>
       </a:hlink>
       <a:folHlink>
-        <a:srgbClr val="715214"/>
+        <a:srgbClr val="493E27"/>
       </a:folHlink>
     </a:clrScheme>
     <a:fontScheme name="Office">
